--- a/2 - NSparkAvancé - Spark Submit - Scala.pptx
+++ b/2 - NSparkAvancé - Spark Submit - Scala.pptx
@@ -9120,7 +9120,7 @@
                 <a:ea typeface="Calibri" panose="020F0502020204030204" pitchFamily="34" charset="0"/>
                 <a:cs typeface="Arial" panose="020B0604020202020204" pitchFamily="34" charset="0"/>
               </a:rPr>
-              <a:t>built.sbt</a:t>
+              <a:t>build.sbt</a:t>
             </a:r>
             <a:endParaRPr lang="fr-FR" sz="1200" dirty="0">
               <a:ea typeface="Calibri" panose="020F0502020204030204" pitchFamily="34" charset="0"/>
@@ -11915,6 +11915,21 @@
 </file>
 
 <file path=customXml/item1.xml><?xml version="1.0" encoding="utf-8"?>
+<p:properties xmlns:p="http://schemas.microsoft.com/office/2006/metadata/properties" xmlns:xsi="http://www.w3.org/2001/XMLSchema-instance" xmlns:pc="http://schemas.microsoft.com/office/infopath/2007/PartnerControls">
+  <documentManagement>
+    <SharedWithUsers xmlns="73eca01c-4ea5-40c8-83fd-b296bd340025">
+      <UserInfo>
+        <DisplayName>Abir GUENICH - Ingénieure d’affaire</DisplayName>
+        <AccountId>246</AccountId>
+        <AccountType/>
+      </UserInfo>
+    </SharedWithUsers>
+    <_activity xmlns="6f1b3788-58c0-46a5-9604-64d97c7fc47c" xsi:nil="true"/>
+  </documentManagement>
+</p:properties>
+</file>
+
+<file path=customXml/item2.xml><?xml version="1.0" encoding="utf-8"?>
 <ct:contentTypeSchema xmlns:ct="http://schemas.microsoft.com/office/2006/metadata/contentType" xmlns:ma="http://schemas.microsoft.com/office/2006/metadata/properties/metaAttributes" ct:_="" ma:_="" ma:contentTypeName="Document" ma:contentTypeID="0x01010058419B1710D3DF4A9DAA9ADF73C802B5" ma:contentTypeVersion="14" ma:contentTypeDescription="Crée un document." ma:contentTypeScope="" ma:versionID="d45f398bd182fafaec1e6b20d8a38b6f">
   <xsd:schema xmlns:xsd="http://www.w3.org/2001/XMLSchema" xmlns:xs="http://www.w3.org/2001/XMLSchema" xmlns:p="http://schemas.microsoft.com/office/2006/metadata/properties" xmlns:ns3="6f1b3788-58c0-46a5-9604-64d97c7fc47c" xmlns:ns4="73eca01c-4ea5-40c8-83fd-b296bd340025" targetNamespace="http://schemas.microsoft.com/office/2006/metadata/properties" ma:root="true" ma:fieldsID="de746a5257d740f042749d495693305b" ns3:_="" ns4:_="">
     <xsd:import namespace="6f1b3788-58c0-46a5-9604-64d97c7fc47c"/>
@@ -12139,21 +12154,6 @@
 </ct:contentTypeSchema>
 </file>
 
-<file path=customXml/item2.xml><?xml version="1.0" encoding="utf-8"?>
-<p:properties xmlns:p="http://schemas.microsoft.com/office/2006/metadata/properties" xmlns:xsi="http://www.w3.org/2001/XMLSchema-instance" xmlns:pc="http://schemas.microsoft.com/office/infopath/2007/PartnerControls">
-  <documentManagement>
-    <SharedWithUsers xmlns="73eca01c-4ea5-40c8-83fd-b296bd340025">
-      <UserInfo>
-        <DisplayName>Abir GUENICH - Ingénieure d’affaire</DisplayName>
-        <AccountId>246</AccountId>
-        <AccountType/>
-      </UserInfo>
-    </SharedWithUsers>
-    <_activity xmlns="6f1b3788-58c0-46a5-9604-64d97c7fc47c" xsi:nil="true"/>
-  </documentManagement>
-</p:properties>
-</file>
-
 <file path=customXml/item3.xml><?xml version="1.0" encoding="utf-8"?>
 <?mso-contentType ?>
 <FormTemplates xmlns="http://schemas.microsoft.com/sharepoint/v3/contenttype/forms">
@@ -12164,6 +12164,23 @@
 </file>
 
 <file path=customXml/itemProps1.xml><?xml version="1.0" encoding="utf-8"?>
+<ds:datastoreItem xmlns:ds="http://schemas.openxmlformats.org/officeDocument/2006/customXml" ds:itemID="{40C00205-F11F-4D61-9572-D162BE7CE022}">
+  <ds:schemaRefs>
+    <ds:schemaRef ds:uri="http://schemas.microsoft.com/office/infopath/2007/PartnerControls"/>
+    <ds:schemaRef ds:uri="http://purl.org/dc/terms/"/>
+    <ds:schemaRef ds:uri="http://purl.org/dc/elements/1.1/"/>
+    <ds:schemaRef ds:uri="6f1b3788-58c0-46a5-9604-64d97c7fc47c"/>
+    <ds:schemaRef ds:uri="73eca01c-4ea5-40c8-83fd-b296bd340025"/>
+    <ds:schemaRef ds:uri="http://purl.org/dc/dcmitype/"/>
+    <ds:schemaRef ds:uri="http://schemas.openxmlformats.org/package/2006/metadata/core-properties"/>
+    <ds:schemaRef ds:uri="http://schemas.microsoft.com/office/2006/documentManagement/types"/>
+    <ds:schemaRef ds:uri="http://www.w3.org/XML/1998/namespace"/>
+    <ds:schemaRef ds:uri="http://schemas.microsoft.com/office/2006/metadata/properties"/>
+  </ds:schemaRefs>
+</ds:datastoreItem>
+</file>
+
+<file path=customXml/itemProps2.xml><?xml version="1.0" encoding="utf-8"?>
 <ds:datastoreItem xmlns:ds="http://schemas.openxmlformats.org/officeDocument/2006/customXml" ds:itemID="{13D40C7A-64C6-4B3B-A1B6-9CB64BC75662}">
   <ds:schemaRefs>
     <ds:schemaRef ds:uri="http://schemas.microsoft.com/office/2006/metadata/contentType"/>
@@ -12182,23 +12199,6 @@
 </ds:datastoreItem>
 </file>
 
-<file path=customXml/itemProps2.xml><?xml version="1.0" encoding="utf-8"?>
-<ds:datastoreItem xmlns:ds="http://schemas.openxmlformats.org/officeDocument/2006/customXml" ds:itemID="{40C00205-F11F-4D61-9572-D162BE7CE022}">
-  <ds:schemaRefs>
-    <ds:schemaRef ds:uri="http://schemas.microsoft.com/office/infopath/2007/PartnerControls"/>
-    <ds:schemaRef ds:uri="http://purl.org/dc/terms/"/>
-    <ds:schemaRef ds:uri="http://purl.org/dc/elements/1.1/"/>
-    <ds:schemaRef ds:uri="6f1b3788-58c0-46a5-9604-64d97c7fc47c"/>
-    <ds:schemaRef ds:uri="73eca01c-4ea5-40c8-83fd-b296bd340025"/>
-    <ds:schemaRef ds:uri="http://purl.org/dc/dcmitype/"/>
-    <ds:schemaRef ds:uri="http://schemas.openxmlformats.org/package/2006/metadata/core-properties"/>
-    <ds:schemaRef ds:uri="http://schemas.microsoft.com/office/2006/documentManagement/types"/>
-    <ds:schemaRef ds:uri="http://www.w3.org/XML/1998/namespace"/>
-    <ds:schemaRef ds:uri="http://schemas.microsoft.com/office/2006/metadata/properties"/>
-  </ds:schemaRefs>
-</ds:datastoreItem>
-</file>
-
 <file path=customXml/itemProps3.xml><?xml version="1.0" encoding="utf-8"?>
 <ds:datastoreItem xmlns:ds="http://schemas.openxmlformats.org/officeDocument/2006/customXml" ds:itemID="{EBAA46D8-DF31-4768-AD82-8F485C82E644}">
   <ds:schemaRefs>
